--- a/pitch/Alpha_Movies_Proposal.pptx
+++ b/pitch/Alpha_Movies_Proposal.pptx
@@ -3453,7 +3453,7 @@
                 <a:ea typeface="Arial" pitchFamily="34" charset="-122"/>
                 <a:cs typeface="Arial" pitchFamily="34" charset="-120"/>
               </a:rPr>
-              <a:t>Alpha Movies Ltd (formerly Tue Tue Concept)</a:t>
+              <a:t>Alpha Movies Ltd (formerly [Confirm the trading name])</a:t>
             </a:r>
             <a:endParaRPr lang="en-US" sz="1400" dirty="0"/>
           </a:p>
@@ -3958,7 +3958,7 @@
                 <a:ea typeface="Arial" pitchFamily="34" charset="-122"/>
                 <a:cs typeface="Arial" pitchFamily="34" charset="-120"/>
               </a:rPr>
-              <a:t>Instagram @alpha.movies_ and YouTube @Boy-concept</a:t>
+              <a:t>Instagram and YouTube [Confirm both handles]</a:t>
             </a:r>
             <a:endParaRPr lang="en-US" sz="1400" dirty="0"/>
           </a:p>
@@ -5113,7 +5113,7 @@
                 <a:ea typeface="Arial" pitchFamily="34" charset="-122"/>
                 <a:cs typeface="Arial" pitchFamily="34" charset="-120"/>
               </a:rPr>
-              <a:t>A dark, fast-loading showcase sorted into Commercial, Cultural Festivals, Weddings and Documentaries. One hero reel, silent hover previews, and a player that holds quality better than a social feed.</a:t>
+              <a:t>A dark, fast-loading showcase sorted into Commercial, Cultural Festivals, Weddings and Documentaries. One hero reel, poster-first cards, and a player that holds quality better than a social feed.</a:t>
             </a:r>
             <a:endParaRPr lang="en-US" sz="1400" dirty="0"/>
           </a:p>
